--- a/ARCHITECTURE.pptx
+++ b/ARCHITECTURE.pptx
@@ -3096,8 +3096,8 @@
         </p:nvSpPr>
         <p:spPr>
           <a:xfrm>
-            <a:off x="365760" y="164592"/>
-            <a:ext cx="11430000" cy="822960"/>
+            <a:off x="365760" y="137160"/>
+            <a:ext cx="11475720" cy="731520"/>
           </a:xfrm>
           <a:prstGeom prst="rect">
             <a:avLst/>
@@ -3105,13 +3105,13 @@
           <a:noFill/>
         </p:spPr>
         <p:txBody>
-          <a:bodyPr wrap="none">
-            <a:spAutoFit/>
+          <a:bodyPr wrap="square">
+            <a:noAutofit/>
           </a:bodyPr>
           <a:lstStyle/>
           <a:p>
             <a:r>
-              <a:rPr sz="2800" b="1">
+              <a:rPr sz="2400" b="1">
                 <a:solidFill>
                   <a:srgbClr val="7C3AED"/>
                 </a:solidFill>
@@ -3121,12 +3121,12 @@
           </a:p>
           <a:p>
             <a:r>
-              <a:rPr sz="1200">
+              <a:rPr sz="1050">
                 <a:solidFill>
                   <a:srgbClr val="1F2A37"/>
                 </a:solidFill>
               </a:rPr>
-              <a:t>Local, privacy-preserving LLM assistant: live FortiGate data + built-in docs, all on your machine (no cloud keys).</a:t>
+              <a:t>Local, privacy-preserving LLM assistant — live FortiGate data + built-in docs, no cloud keys.</a:t>
             </a:r>
           </a:p>
         </p:txBody>
@@ -3139,8 +3139,8 @@
         </p:nvSpPr>
         <p:spPr>
           <a:xfrm>
-            <a:off x="2331720" y="1234440"/>
-            <a:ext cx="2331720" cy="822960"/>
+            <a:off x="2331720" y="1188720"/>
+            <a:ext cx="2331720" cy="731520"/>
           </a:xfrm>
           <a:prstGeom prst="roundRect">
             <a:avLst/>
@@ -3170,12 +3170,14 @@
           </a:fontRef>
         </p:style>
         <p:txBody>
-          <a:bodyPr rtlCol="0" anchor="ctr" wrap="square" tIns="25400" bIns="25400"/>
+          <a:bodyPr rtlCol="0" anchor="ctr" wrap="square" tIns="25400" bIns="25400" lIns="25400" rIns="25400">
+            <a:noAutofit/>
+          </a:bodyPr>
           <a:lstStyle/>
           <a:p>
             <a:pPr algn="ctr"/>
             <a:r>
-              <a:rPr b="1" sz="1400">
+              <a:rPr b="1" sz="1250">
                 <a:solidFill>
                   <a:srgbClr val="FFFFFF"/>
                 </a:solidFill>
@@ -3186,12 +3188,12 @@
           <a:p>
             <a:pPr algn="ctr"/>
             <a:r>
-              <a:rPr sz="900">
+              <a:rPr sz="850">
                 <a:solidFill>
                   <a:srgbClr val="FFFFFF"/>
                 </a:solidFill>
               </a:rPr>
-              <a:t>OLLAMA_BASE_URL · reasons + emits TOOL: calls</a:t>
+              <a:t>OLLAMA_BASE_URL · emits TOOL: calls</a:t>
             </a:r>
           </a:p>
         </p:txBody>
@@ -3204,8 +3206,8 @@
         </p:nvSpPr>
         <p:spPr>
           <a:xfrm>
-            <a:off x="411480" y="2788920"/>
-            <a:ext cx="1600200" cy="960120"/>
+            <a:off x="411480" y="2697480"/>
+            <a:ext cx="1554480" cy="868680"/>
           </a:xfrm>
           <a:prstGeom prst="roundRect">
             <a:avLst/>
@@ -3235,12 +3237,14 @@
           </a:fontRef>
         </p:style>
         <p:txBody>
-          <a:bodyPr rtlCol="0" anchor="ctr" wrap="square" tIns="25400" bIns="25400"/>
+          <a:bodyPr rtlCol="0" anchor="ctr" wrap="square" tIns="25400" bIns="25400" lIns="25400" rIns="25400">
+            <a:noAutofit/>
+          </a:bodyPr>
           <a:lstStyle/>
           <a:p>
             <a:pPr algn="ctr"/>
             <a:r>
-              <a:rPr b="1" sz="1400">
+              <a:rPr b="1" sz="1250">
                 <a:solidFill>
                   <a:srgbClr val="FFFFFF"/>
                 </a:solidFill>
@@ -3251,7 +3255,7 @@
           <a:p>
             <a:pPr algn="ctr"/>
             <a:r>
-              <a:rPr sz="1000">
+              <a:rPr sz="850">
                 <a:solidFill>
                   <a:srgbClr val="FFFFFF"/>
                 </a:solidFill>
@@ -3269,8 +3273,8 @@
         </p:nvSpPr>
         <p:spPr>
           <a:xfrm>
-            <a:off x="2331720" y="2788920"/>
-            <a:ext cx="2331720" cy="960120"/>
+            <a:off x="2331720" y="2697480"/>
+            <a:ext cx="2331720" cy="868680"/>
           </a:xfrm>
           <a:prstGeom prst="roundRect">
             <a:avLst/>
@@ -3300,12 +3304,14 @@
           </a:fontRef>
         </p:style>
         <p:txBody>
-          <a:bodyPr rtlCol="0" anchor="ctr" wrap="square" tIns="25400" bIns="25400"/>
+          <a:bodyPr rtlCol="0" anchor="ctr" wrap="square" tIns="25400" bIns="25400" lIns="25400" rIns="25400">
+            <a:noAutofit/>
+          </a:bodyPr>
           <a:lstStyle/>
           <a:p>
             <a:pPr algn="ctr"/>
             <a:r>
-              <a:rPr b="1" sz="1400">
+              <a:rPr b="1" sz="1250">
                 <a:solidFill>
                   <a:srgbClr val="FFFFFF"/>
                 </a:solidFill>
@@ -3316,7 +3322,7 @@
           <a:p>
             <a:pPr algn="ctr"/>
             <a:r>
-              <a:rPr sz="900">
+              <a:rPr sz="850">
                 <a:solidFill>
                   <a:srgbClr val="FFFFFF"/>
                 </a:solidFill>
@@ -3334,8 +3340,8 @@
         </p:nvSpPr>
         <p:spPr>
           <a:xfrm>
-            <a:off x="4983480" y="2788920"/>
-            <a:ext cx="2148840" cy="960120"/>
+            <a:off x="4983480" y="2697480"/>
+            <a:ext cx="2103120" cy="868680"/>
           </a:xfrm>
           <a:prstGeom prst="roundRect">
             <a:avLst/>
@@ -3365,12 +3371,14 @@
           </a:fontRef>
         </p:style>
         <p:txBody>
-          <a:bodyPr rtlCol="0" anchor="ctr" wrap="square" tIns="25400" bIns="25400"/>
+          <a:bodyPr rtlCol="0" anchor="ctr" wrap="square" tIns="25400" bIns="25400" lIns="25400" rIns="25400">
+            <a:noAutofit/>
+          </a:bodyPr>
           <a:lstStyle/>
           <a:p>
             <a:pPr algn="ctr"/>
             <a:r>
-              <a:rPr b="1" sz="1400">
+              <a:rPr b="1" sz="1250">
                 <a:solidFill>
                   <a:srgbClr val="FFFFFF"/>
                 </a:solidFill>
@@ -3381,7 +3389,7 @@
           <a:p>
             <a:pPr algn="ctr"/>
             <a:r>
-              <a:rPr sz="900">
+              <a:rPr sz="850">
                 <a:solidFill>
                   <a:srgbClr val="FFFFFF"/>
                 </a:solidFill>
@@ -3399,8 +3407,8 @@
         </p:nvSpPr>
         <p:spPr>
           <a:xfrm>
-            <a:off x="7406640" y="2788920"/>
-            <a:ext cx="1874519" cy="960120"/>
+            <a:off x="7360920" y="2697480"/>
+            <a:ext cx="1828800" cy="868680"/>
           </a:xfrm>
           <a:prstGeom prst="roundRect">
             <a:avLst/>
@@ -3430,12 +3438,14 @@
           </a:fontRef>
         </p:style>
         <p:txBody>
-          <a:bodyPr rtlCol="0" anchor="ctr" wrap="square" tIns="25400" bIns="25400"/>
+          <a:bodyPr rtlCol="0" anchor="ctr" wrap="square" tIns="25400" bIns="25400" lIns="25400" rIns="25400">
+            <a:noAutofit/>
+          </a:bodyPr>
           <a:lstStyle/>
           <a:p>
             <a:pPr algn="ctr"/>
             <a:r>
-              <a:rPr b="1" sz="1400">
+              <a:rPr b="1" sz="1250">
                 <a:solidFill>
                   <a:srgbClr val="FFFFFF"/>
                 </a:solidFill>
@@ -3446,7 +3456,7 @@
           <a:p>
             <a:pPr algn="ctr"/>
             <a:r>
-              <a:rPr sz="900">
+              <a:rPr sz="850">
                 <a:solidFill>
                   <a:srgbClr val="FFFFFF"/>
                 </a:solidFill>
@@ -3464,8 +3474,8 @@
         </p:nvSpPr>
         <p:spPr>
           <a:xfrm>
-            <a:off x="9555480" y="2788920"/>
-            <a:ext cx="2240280" cy="960120"/>
+            <a:off x="9464040" y="2697480"/>
+            <a:ext cx="2286000" cy="868680"/>
           </a:xfrm>
           <a:prstGeom prst="roundRect">
             <a:avLst/>
@@ -3495,12 +3505,14 @@
           </a:fontRef>
         </p:style>
         <p:txBody>
-          <a:bodyPr rtlCol="0" anchor="ctr" wrap="square" tIns="25400" bIns="25400"/>
+          <a:bodyPr rtlCol="0" anchor="ctr" wrap="square" tIns="25400" bIns="25400" lIns="25400" rIns="25400">
+            <a:noAutofit/>
+          </a:bodyPr>
           <a:lstStyle/>
           <a:p>
             <a:pPr algn="ctr"/>
             <a:r>
-              <a:rPr b="1" sz="1400">
+              <a:rPr b="1" sz="1250">
                 <a:solidFill>
                   <a:srgbClr val="FFFFFF"/>
                 </a:solidFill>
@@ -3511,7 +3523,7 @@
           <a:p>
             <a:pPr algn="ctr"/>
             <a:r>
-              <a:rPr sz="900">
+              <a:rPr sz="850">
                 <a:solidFill>
                   <a:srgbClr val="FFFFFF"/>
                 </a:solidFill>
@@ -3529,8 +3541,8 @@
         </p:nvSpPr>
         <p:spPr>
           <a:xfrm>
-            <a:off x="2331720" y="4343400"/>
-            <a:ext cx="2331720" cy="822960"/>
+            <a:off x="2331720" y="4069080"/>
+            <a:ext cx="2331720" cy="731520"/>
           </a:xfrm>
           <a:prstGeom prst="roundRect">
             <a:avLst/>
@@ -3560,12 +3572,14 @@
           </a:fontRef>
         </p:style>
         <p:txBody>
-          <a:bodyPr rtlCol="0" anchor="ctr" wrap="square" tIns="25400" bIns="25400"/>
+          <a:bodyPr rtlCol="0" anchor="ctr" wrap="square" tIns="25400" bIns="25400" lIns="25400" rIns="25400">
+            <a:noAutofit/>
+          </a:bodyPr>
           <a:lstStyle/>
           <a:p>
             <a:pPr algn="ctr"/>
             <a:r>
-              <a:rPr b="1" sz="1400">
+              <a:rPr b="1" sz="1250">
                 <a:solidFill>
                   <a:srgbClr val="FFFFFF"/>
                 </a:solidFill>
@@ -3576,12 +3590,12 @@
           <a:p>
             <a:pPr algn="ctr"/>
             <a:r>
-              <a:rPr sz="900">
+              <a:rPr sz="850">
                 <a:solidFill>
                   <a:srgbClr val="FFFFFF"/>
                 </a:solidFill>
               </a:rPr>
-              <a:t>Built-in documentation → prompt context</a:t>
+              <a:t>Built-in docs → prompt context</a:t>
             </a:r>
           </a:p>
         </p:txBody>
@@ -3594,8 +3608,8 @@
         </p:nvSpPr>
         <p:spPr>
           <a:xfrm>
-            <a:off x="4983480" y="4343400"/>
-            <a:ext cx="2148840" cy="822960"/>
+            <a:off x="4983480" y="4069080"/>
+            <a:ext cx="2103120" cy="731520"/>
           </a:xfrm>
           <a:prstGeom prst="roundRect">
             <a:avLst/>
@@ -3625,12 +3639,14 @@
           </a:fontRef>
         </p:style>
         <p:txBody>
-          <a:bodyPr rtlCol="0" anchor="ctr" wrap="square" tIns="25400" bIns="25400"/>
+          <a:bodyPr rtlCol="0" anchor="ctr" wrap="square" tIns="25400" bIns="25400" lIns="25400" rIns="25400">
+            <a:noAutofit/>
+          </a:bodyPr>
           <a:lstStyle/>
           <a:p>
             <a:pPr algn="ctr"/>
             <a:r>
-              <a:rPr b="1" sz="1400">
+              <a:rPr b="1" sz="1250">
                 <a:solidFill>
                   <a:srgbClr val="FFFFFF"/>
                 </a:solidFill>
@@ -3641,12 +3657,12 @@
           <a:p>
             <a:pPr algn="ctr"/>
             <a:r>
-              <a:rPr sz="900">
+              <a:rPr sz="850">
                 <a:solidFill>
                   <a:srgbClr val="FFFFFF"/>
                 </a:solidFill>
               </a:rPr>
-              <a:t>host · token · VDOM · log source</a:t>
+              <a:t>host · token · log source · Ollama URL</a:t>
             </a:r>
           </a:p>
         </p:txBody>
@@ -3659,13 +3675,13 @@
         </p:nvCxnSpPr>
         <p:spPr>
           <a:xfrm>
-            <a:off x="2011680" y="3268979"/>
-            <a:ext cx="320040" cy="0"/>
+            <a:off x="1965960" y="3131820"/>
+            <a:ext cx="365760" cy="0"/>
           </a:xfrm>
           <a:prstGeom prst="line">
             <a:avLst/>
           </a:prstGeom>
-          <a:ln w="28575">
+          <a:ln w="25400">
             <a:solidFill>
               <a:srgbClr val="94A3B8"/>
             </a:solidFill>
@@ -3696,13 +3712,13 @@
         </p:nvCxnSpPr>
         <p:spPr>
           <a:xfrm flipV="1">
-            <a:off x="3493008" y="2057400"/>
-            <a:ext cx="0" cy="731520"/>
+            <a:off x="3493008" y="1920240"/>
+            <a:ext cx="0" cy="777240"/>
           </a:xfrm>
           <a:prstGeom prst="line">
             <a:avLst/>
           </a:prstGeom>
-          <a:ln w="28575">
+          <a:ln w="25400">
             <a:solidFill>
               <a:srgbClr val="94A3B8"/>
             </a:solidFill>
@@ -3733,8 +3749,8 @@
         </p:nvSpPr>
         <p:spPr>
           <a:xfrm>
-            <a:off x="2670048" y="2167128"/>
-            <a:ext cx="1645920" cy="274320"/>
+            <a:off x="2715768" y="2162556"/>
+            <a:ext cx="1554480" cy="237744"/>
           </a:xfrm>
           <a:prstGeom prst="rect">
             <a:avLst/>
@@ -3743,13 +3759,13 @@
         </p:spPr>
         <p:txBody>
           <a:bodyPr wrap="none">
-            <a:spAutoFit/>
+            <a:noAutofit/>
           </a:bodyPr>
           <a:lstStyle/>
           <a:p>
             <a:pPr algn="ctr"/>
             <a:r>
-              <a:rPr sz="850" i="1">
+              <a:rPr sz="800" i="1">
                 <a:solidFill>
                   <a:srgbClr val="1F2A37"/>
                 </a:solidFill>
@@ -3767,13 +3783,13 @@
         </p:nvCxnSpPr>
         <p:spPr>
           <a:xfrm>
-            <a:off x="4663440" y="3268979"/>
+            <a:off x="4663440" y="3131820"/>
             <a:ext cx="320040" cy="0"/>
           </a:xfrm>
           <a:prstGeom prst="line">
             <a:avLst/>
           </a:prstGeom>
-          <a:ln w="28575">
+          <a:ln w="25400">
             <a:solidFill>
               <a:srgbClr val="94A3B8"/>
             </a:solidFill>
@@ -3803,8 +3819,8 @@
         </p:nvSpPr>
         <p:spPr>
           <a:xfrm>
-            <a:off x="4000500" y="3012948"/>
-            <a:ext cx="1645920" cy="274320"/>
+            <a:off x="4046220" y="2985516"/>
+            <a:ext cx="1554480" cy="237744"/>
           </a:xfrm>
           <a:prstGeom prst="rect">
             <a:avLst/>
@@ -3813,13 +3829,13 @@
         </p:spPr>
         <p:txBody>
           <a:bodyPr wrap="none">
-            <a:spAutoFit/>
+            <a:noAutofit/>
           </a:bodyPr>
           <a:lstStyle/>
           <a:p>
             <a:pPr algn="ctr"/>
             <a:r>
-              <a:rPr sz="850" i="1">
+              <a:rPr sz="800" i="1">
                 <a:solidFill>
                   <a:srgbClr val="1F2A37"/>
                 </a:solidFill>
@@ -3837,13 +3853,13 @@
         </p:nvCxnSpPr>
         <p:spPr>
           <a:xfrm>
-            <a:off x="7132320" y="3268979"/>
+            <a:off x="7086600" y="3131820"/>
             <a:ext cx="274320" cy="0"/>
           </a:xfrm>
           <a:prstGeom prst="line">
             <a:avLst/>
           </a:prstGeom>
-          <a:ln w="28575">
+          <a:ln w="25400">
             <a:solidFill>
               <a:srgbClr val="94A3B8"/>
             </a:solidFill>
@@ -3873,8 +3889,8 @@
         </p:nvSpPr>
         <p:spPr>
           <a:xfrm>
-            <a:off x="6446519" y="3012948"/>
-            <a:ext cx="1645920" cy="274320"/>
+            <a:off x="6446520" y="2985516"/>
+            <a:ext cx="1554480" cy="237744"/>
           </a:xfrm>
           <a:prstGeom prst="rect">
             <a:avLst/>
@@ -3883,13 +3899,13 @@
         </p:spPr>
         <p:txBody>
           <a:bodyPr wrap="none">
-            <a:spAutoFit/>
+            <a:noAutofit/>
           </a:bodyPr>
           <a:lstStyle/>
           <a:p>
             <a:pPr algn="ctr"/>
             <a:r>
-              <a:rPr sz="850" i="1">
+              <a:rPr sz="800" i="1">
                 <a:solidFill>
                   <a:srgbClr val="1F2A37"/>
                 </a:solidFill>
@@ -3907,13 +3923,13 @@
         </p:nvCxnSpPr>
         <p:spPr>
           <a:xfrm>
-            <a:off x="9281160" y="3268979"/>
+            <a:off x="9189720" y="3131820"/>
             <a:ext cx="274320" cy="0"/>
           </a:xfrm>
           <a:prstGeom prst="line">
             <a:avLst/>
           </a:prstGeom>
-          <a:ln w="28575">
+          <a:ln w="25400">
             <a:solidFill>
               <a:srgbClr val="94A3B8"/>
             </a:solidFill>
@@ -3943,8 +3959,8 @@
         </p:nvSpPr>
         <p:spPr>
           <a:xfrm>
-            <a:off x="8595360" y="3012948"/>
-            <a:ext cx="1645920" cy="274320"/>
+            <a:off x="8549640" y="2985516"/>
+            <a:ext cx="1554480" cy="237744"/>
           </a:xfrm>
           <a:prstGeom prst="rect">
             <a:avLst/>
@@ -3953,13 +3969,13 @@
         </p:spPr>
         <p:txBody>
           <a:bodyPr wrap="none">
-            <a:spAutoFit/>
+            <a:noAutofit/>
           </a:bodyPr>
           <a:lstStyle/>
           <a:p>
             <a:pPr algn="ctr"/>
             <a:r>
-              <a:rPr sz="850" i="1">
+              <a:rPr sz="800" i="1">
                 <a:solidFill>
                   <a:srgbClr val="1F2A37"/>
                 </a:solidFill>
@@ -3977,13 +3993,13 @@
         </p:nvCxnSpPr>
         <p:spPr>
           <a:xfrm flipV="1">
-            <a:off x="3493008" y="3749039"/>
-            <a:ext cx="0" cy="594361"/>
+            <a:off x="3493008" y="3566160"/>
+            <a:ext cx="0" cy="502920"/>
           </a:xfrm>
           <a:prstGeom prst="line">
             <a:avLst/>
           </a:prstGeom>
-          <a:ln w="28575">
+          <a:ln w="25400">
             <a:solidFill>
               <a:srgbClr val="CA8A04"/>
             </a:solidFill>
@@ -4014,8 +4030,8 @@
         </p:nvSpPr>
         <p:spPr>
           <a:xfrm>
-            <a:off x="2670048" y="3790187"/>
-            <a:ext cx="1645920" cy="274320"/>
+            <a:off x="2715768" y="3671316"/>
+            <a:ext cx="1554480" cy="237744"/>
           </a:xfrm>
           <a:prstGeom prst="rect">
             <a:avLst/>
@@ -4024,18 +4040,18 @@
         </p:spPr>
         <p:txBody>
           <a:bodyPr wrap="none">
-            <a:spAutoFit/>
+            <a:noAutofit/>
           </a:bodyPr>
           <a:lstStyle/>
           <a:p>
             <a:pPr algn="ctr"/>
             <a:r>
-              <a:rPr sz="850" i="1">
+              <a:rPr sz="800" i="1">
                 <a:solidFill>
                   <a:srgbClr val="1F2A37"/>
                 </a:solidFill>
               </a:rPr>
-              <a:t>docs context</a:t>
+              <a:t>docs</a:t>
             </a:r>
           </a:p>
         </p:txBody>
@@ -4048,13 +4064,13 @@
         </p:nvCxnSpPr>
         <p:spPr>
           <a:xfrm flipV="1">
-            <a:off x="6053328" y="3749039"/>
-            <a:ext cx="0" cy="594361"/>
+            <a:off x="6035040" y="3566160"/>
+            <a:ext cx="0" cy="502920"/>
           </a:xfrm>
           <a:prstGeom prst="line">
             <a:avLst/>
           </a:prstGeom>
-          <a:ln w="28575">
+          <a:ln w="25400">
             <a:solidFill>
               <a:srgbClr val="6B7280"/>
             </a:solidFill>
@@ -4085,8 +4101,8 @@
         </p:nvSpPr>
         <p:spPr>
           <a:xfrm>
-            <a:off x="5230368" y="3790187"/>
-            <a:ext cx="1645920" cy="274320"/>
+            <a:off x="5257800" y="3671316"/>
+            <a:ext cx="1554480" cy="237744"/>
           </a:xfrm>
           <a:prstGeom prst="rect">
             <a:avLst/>
@@ -4095,13 +4111,13 @@
         </p:spPr>
         <p:txBody>
           <a:bodyPr wrap="none">
-            <a:spAutoFit/>
+            <a:noAutofit/>
           </a:bodyPr>
           <a:lstStyle/>
           <a:p>
             <a:pPr algn="ctr"/>
             <a:r>
-              <a:rPr sz="850" i="1">
+              <a:rPr sz="800" i="1">
                 <a:solidFill>
                   <a:srgbClr val="1F2A37"/>
                 </a:solidFill>
@@ -4119,8 +4135,8 @@
         </p:nvSpPr>
         <p:spPr>
           <a:xfrm>
-            <a:off x="411480" y="5440680"/>
-            <a:ext cx="11384280" cy="457200"/>
+            <a:off x="411480" y="4983480"/>
+            <a:ext cx="11384280" cy="502920"/>
           </a:xfrm>
           <a:prstGeom prst="rect">
             <a:avLst/>
@@ -4128,18 +4144,26 @@
           <a:noFill/>
         </p:spPr>
         <p:txBody>
-          <a:bodyPr wrap="none">
-            <a:spAutoFit/>
+          <a:bodyPr wrap="square">
+            <a:noAutofit/>
           </a:bodyPr>
           <a:lstStyle/>
           <a:p>
-            <a:r>
-              <a:rPr sz="1050" b="1">
+            <a:pPr>
+              <a:spcBef>
+                <a:spcPts val="0"/>
+              </a:spcBef>
+              <a:spcAft>
+                <a:spcPts val="200"/>
+              </a:spcAft>
+            </a:pPr>
+            <a:r>
+              <a:rPr sz="1000" b="1">
                 <a:solidFill>
                   <a:srgbClr val="1F2A37"/>
                 </a:solidFill>
               </a:rPr>
-              <a:t>Traffic flow:  Question → prompt (system + docs) → LLM emits TOOL: call → wrapper → client → HTTPS to FortiGate → JSON back → results accumulate, LLM re-prompted (≤3×) → answer + Recommendation + [PDF] indicator</a:t>
+              <a:t>Traffic flow:  Question → prompt (system + docs) → LLM emits TOOL: call → wrapper → client → HTTPS to FortiGate → JSON back → results accumulate, LLM re-prompted (≤3×) → answer + Recommendation + [PDF].</a:t>
             </a:r>
           </a:p>
         </p:txBody>
@@ -4152,8 +4176,8 @@
         </p:nvSpPr>
         <p:spPr>
           <a:xfrm>
-            <a:off x="411480" y="5897880"/>
-            <a:ext cx="11384280" cy="868680"/>
+            <a:off x="411480" y="5532120"/>
+            <a:ext cx="11384280" cy="1188720"/>
           </a:xfrm>
           <a:prstGeom prst="rect">
             <a:avLst/>
@@ -4162,37 +4186,61 @@
         </p:spPr>
         <p:txBody>
           <a:bodyPr wrap="square">
-            <a:spAutoFit/>
+            <a:noAutofit/>
           </a:bodyPr>
           <a:lstStyle/>
           <a:p>
-            <a:r>
-              <a:rPr sz="1000">
+            <a:pPr>
+              <a:spcBef>
+                <a:spcPts val="0"/>
+              </a:spcBef>
+              <a:spcAft>
+                <a:spcPts val="200"/>
+              </a:spcAft>
+            </a:pPr>
+            <a:r>
+              <a:rPr sz="950" b="0">
                 <a:solidFill>
                   <a:srgbClr val="1F2A37"/>
                 </a:solidFill>
               </a:rPr>
-              <a:t>•  Text-based tool protocol (model prints TOOL: name(args), parsed by regex) — keeps it model-agnostic.</a:t>
-            </a:r>
-          </a:p>
-          <a:p>
-            <a:r>
-              <a:rPr sz="1000">
+              <a:t>•  Text-based tool protocol (model prints TOOL: name(args), parsed by regex) — model-agnostic.</a:t>
+            </a:r>
+          </a:p>
+          <a:p>
+            <a:pPr>
+              <a:spcBef>
+                <a:spcPts val="0"/>
+              </a:spcBef>
+              <a:spcAft>
+                <a:spcPts val="200"/>
+              </a:spcAft>
+            </a:pPr>
+            <a:r>
+              <a:rPr sz="950" b="0">
                 <a:solidFill>
                   <a:srgbClr val="1F2A37"/>
                 </a:solidFill>
               </a:rPr>
-              <a:t>•  Context accumulates across iterations; errors are surfaced (HTTP 403/404), not swallowed.</a:t>
-            </a:r>
-          </a:p>
-          <a:p>
-            <a:r>
-              <a:rPr sz="1000">
+              <a:t>•  Context accumulates across iterations; real API errors surfaced (403/404), not swallowed.</a:t>
+            </a:r>
+          </a:p>
+          <a:p>
+            <a:pPr>
+              <a:spcBef>
+                <a:spcPts val="0"/>
+              </a:spcBef>
+              <a:spcAft>
+                <a:spcPts val="200"/>
+              </a:spcAft>
+            </a:pPr>
+            <a:r>
+              <a:rPr sz="950" b="0">
                 <a:solidFill>
                   <a:srgbClr val="1F2A37"/>
                 </a:solidFill>
               </a:rPr>
-              <a:t>•  Log tools auto-fall-back disk → memory → forticloud; everything configurable via .env (incl. Ollama URL).</a:t>
+              <a:t>•  Log tools auto-fall-back disk → memory → forticloud; all settings via .env.</a:t>
             </a:r>
           </a:p>
         </p:txBody>
